--- a/Doott_PitchDeck_WhiteRed.pptx
+++ b/Doott_PitchDeck_WhiteRed.pptx
@@ -4222,7 +4222,7 @@
                 </a:solidFill>
                 <a:latin typeface="Calibri"/>
               </a:rPr>
-              <a:t>38%</a:t>
+              <a:t>1L+</a:t>
             </a:r>
           </a:p>
         </p:txBody>
@@ -4534,7 +4534,7 @@
                 </a:solidFill>
                 <a:latin typeface="Calibri"/>
               </a:rPr>
-              <a:t>15+</a:t>
+              <a:t>6</a:t>
             </a:r>
           </a:p>
         </p:txBody>
@@ -6074,7 +6074,7 @@
                 </a:solidFill>
                 <a:latin typeface="Calibri"/>
               </a:rPr>
-              <a:t>Meet Doott — One Platform. Entire Sales Pipeline.</a:t>
+              <a:t>Meet Doott — Your B2B Intelligence, Instantly.</a:t>
             </a:r>
           </a:p>
         </p:txBody>
@@ -6109,7 +6109,7 @@
                 </a:solidFill>
                 <a:latin typeface="Calibri"/>
               </a:rPr>
-              <a:t>6-stage autonomous AI pipeline · 10,000 leads/week · zero manual effort</a:t>
+              <a:t>Companies · People · Emails · Numbers · Categories · AI Chatbot — live today</a:t>
             </a:r>
           </a:p>
         </p:txBody>
@@ -6211,7 +6211,7 @@
                 </a:solidFill>
                 <a:latin typeface="Calibri"/>
               </a:rPr>
-              <a:t>🔍</a:t>
+              <a:t>🏢</a:t>
             </a:r>
           </a:p>
         </p:txBody>
@@ -6246,7 +6246,7 @@
                 </a:solidFill>
                 <a:latin typeface="Calibri"/>
               </a:rPr>
-              <a:t>DISCOVER</a:t>
+              <a:t>COMPANIES</a:t>
             </a:r>
           </a:p>
         </p:txBody>
@@ -6281,7 +6281,7 @@
                 </a:solidFill>
                 <a:latin typeface="Calibri"/>
               </a:rPr>
-              <a:t>Finds ICP-matched companies</a:t>
+              <a:t>Search 1L+ verified Indian B2B companies</a:t>
             </a:r>
           </a:p>
         </p:txBody>
@@ -6359,7 +6359,7 @@
                 </a:solidFill>
                 <a:latin typeface="Calibri"/>
               </a:rPr>
-              <a:t>📋</a:t>
+              <a:t>👥</a:t>
             </a:r>
           </a:p>
         </p:txBody>
@@ -6394,7 +6394,7 @@
                 </a:solidFill>
                 <a:latin typeface="Calibri"/>
               </a:rPr>
-              <a:t>ENRICH</a:t>
+              <a:t>PEOPLE</a:t>
             </a:r>
           </a:p>
         </p:txBody>
@@ -6429,7 +6429,7 @@
                 </a:solidFill>
                 <a:latin typeface="Calibri"/>
               </a:rPr>
-              <a:t>Verified emails &amp; decision-makers</a:t>
+              <a:t>Find decision-makers: CTOs, VPs, founders</a:t>
             </a:r>
           </a:p>
         </p:txBody>
@@ -6507,7 +6507,7 @@
                 </a:solidFill>
                 <a:latin typeface="Calibri"/>
               </a:rPr>
-              <a:t>✉️</a:t>
+              <a:t>📧</a:t>
             </a:r>
           </a:p>
         </p:txBody>
@@ -6542,7 +6542,7 @@
                 </a:solidFill>
                 <a:latin typeface="Calibri"/>
               </a:rPr>
-              <a:t>OUTREACH</a:t>
+              <a:t>EMAILS</a:t>
             </a:r>
           </a:p>
         </p:txBody>
@@ -6577,7 +6577,7 @@
                 </a:solidFill>
                 <a:latin typeface="Calibri"/>
               </a:rPr>
-              <a:t>AI-written personalized emails</a:t>
+              <a:t>Verified emails ready to use — zero bounces</a:t>
             </a:r>
           </a:p>
         </p:txBody>
@@ -6655,7 +6655,7 @@
                 </a:solidFill>
                 <a:latin typeface="Calibri"/>
               </a:rPr>
-              <a:t>📈</a:t>
+              <a:t>📞</a:t>
             </a:r>
           </a:p>
         </p:txBody>
@@ -6690,7 +6690,7 @@
                 </a:solidFill>
                 <a:latin typeface="Calibri"/>
               </a:rPr>
-              <a:t>SCORE</a:t>
+              <a:t>NUMBERS</a:t>
             </a:r>
           </a:p>
         </p:txBody>
@@ -6725,7 +6725,7 @@
                 </a:solidFill>
                 <a:latin typeface="Calibri"/>
               </a:rPr>
-              <a:t>Scores every lead 0–100</a:t>
+              <a:t>Direct-dial numbers for Indian B2B contacts</a:t>
             </a:r>
           </a:p>
         </p:txBody>
@@ -6803,7 +6803,7 @@
                 </a:solidFill>
                 <a:latin typeface="Calibri"/>
               </a:rPr>
-              <a:t>📊</a:t>
+              <a:t>🔲</a:t>
             </a:r>
           </a:p>
         </p:txBody>
@@ -6838,7 +6838,7 @@
                 </a:solidFill>
                 <a:latin typeface="Calibri"/>
               </a:rPr>
-              <a:t>REPORT</a:t>
+              <a:t>CATEGORIES</a:t>
             </a:r>
           </a:p>
         </p:txBody>
@@ -6873,7 +6873,7 @@
                 </a:solidFill>
                 <a:latin typeface="Calibri"/>
               </a:rPr>
-              <a:t>Live Google Sheets dashboard</a:t>
+              <a:t>Browse any industry vertical for targeted leads</a:t>
             </a:r>
           </a:p>
         </p:txBody>
@@ -6951,7 +6951,7 @@
                 </a:solidFill>
                 <a:latin typeface="Calibri"/>
               </a:rPr>
-              <a:t>🤖</a:t>
+              <a:t>💬</a:t>
             </a:r>
           </a:p>
         </p:txBody>
@@ -6986,7 +6986,7 @@
                 </a:solidFill>
                 <a:latin typeface="Calibri"/>
               </a:rPr>
-              <a:t>CHATBOT</a:t>
+              <a:t>ASK DOOTT</a:t>
             </a:r>
           </a:p>
         </p:txBody>
@@ -7021,7 +7021,7 @@
                 </a:solidFill>
                 <a:latin typeface="Calibri"/>
               </a:rPr>
-              <a:t>RAG AI chatbot 24/7</a:t>
+              <a:t>AI chatbot answers sales questions 24/7</a:t>
             </a:r>
           </a:p>
         </p:txBody>
@@ -7142,7 +7142,7 @@
                 </a:solidFill>
                 <a:latin typeface="Calibri"/>
               </a:rPr>
-              <a:t>⚡  Result:  What takes a sales team 1 full week — Doott does in 5 minutes.  10,000 leads/week.  Zero manual effort.</a:t>
+              <a:t>⚡  Result:  What takes a sales team 1 full week — Doott does in 5 minutes.  Doott surfaces it in seconds.</a:t>
             </a:r>
           </a:p>
         </p:txBody>
@@ -13454,7 +13454,7 @@
                 </a:solidFill>
                 <a:latin typeface="Calibri"/>
               </a:rPr>
-              <a:t>15+</a:t>
+              <a:t>6</a:t>
             </a:r>
           </a:p>
         </p:txBody>
@@ -13489,8 +13489,8 @@
                 </a:solidFill>
                 <a:latin typeface="Calibri"/>
               </a:rPr>
-              <a:t>Platform Modules
-Built &amp; Live</a:t>
+              <a:t>Live Features
+In the Product</a:t>
             </a:r>
           </a:p>
         </p:txBody>
@@ -13568,7 +13568,7 @@
                 </a:solidFill>
                 <a:latin typeface="Calibri"/>
               </a:rPr>
-              <a:t>38%</a:t>
+              <a:t>1L+</a:t>
             </a:r>
           </a:p>
         </p:txBody>
@@ -13603,8 +13603,8 @@
                 </a:solidFill>
                 <a:latin typeface="Calibri"/>
               </a:rPr>
-              <a:t>Email Open Rate
-vs 21% industry</a:t>
+              <a:t>Indian B2B Contacts
+Indexed &amp; Verified</a:t>
             </a:r>
           </a:p>
         </p:txBody>
@@ -13717,8 +13717,8 @@
                 </a:solidFill>
                 <a:latin typeface="Calibri"/>
               </a:rPr>
-              <a:t>Autonomous AI
-Agents Running</a:t>
+              <a:t>Live Core Features
+Shipped to Users</a:t>
             </a:r>
           </a:p>
         </p:txBody>
@@ -13976,7 +13976,7 @@
                 </a:solidFill>
                 <a:latin typeface="Calibri"/>
               </a:rPr>
-              <a:t>✅ AI Pipeline  ✅ 1L+ Contacts  ✅ RAG Chatbot  ✅ Social Automation  ✅ Places Scraper  ✅ Multi-tenant CRM</a:t>
+              <a:t>✅ Companies DB  ✅ People DB  ✅ Emails Lookup  ✅ Numbers Lookup  ✅ Categories  ✅ Ask Doott AI Chatbot</a:t>
             </a:r>
           </a:p>
         </p:txBody>
